--- a/2025/00 Литература.pptx
+++ b/2025/00 Литература.pptx
@@ -200,7 +200,7 @@
           <a:p>
             <a:fld id="{CDA96C9A-3213-B245-BC64-7E419D14BD9D}" type="datetimeFigureOut">
               <a:rPr lang="ru-RU" smtClean="0"/>
-              <a:t>15.07.2025</a:t>
+              <a:t>21.07.2025</a:t>
             </a:fld>
             <a:endParaRPr lang="ru-RU"/>
           </a:p>
@@ -598,7 +598,7 @@
           <a:p>
             <a:fld id="{BEE214BE-636D-8A45-BCA6-8B7ED77AA124}" type="datetime1">
               <a:rPr lang="ru-RU" smtClean="0"/>
-              <a:t>15.07.2025</a:t>
+              <a:t>21.07.2025</a:t>
             </a:fld>
             <a:endParaRPr lang="en-US"/>
           </a:p>
@@ -768,7 +768,7 @@
           <a:p>
             <a:fld id="{5855274A-4ED4-0146-A3E9-88EF200B5196}" type="datetime1">
               <a:rPr lang="ru-RU" smtClean="0"/>
-              <a:t>15.07.2025</a:t>
+              <a:t>21.07.2025</a:t>
             </a:fld>
             <a:endParaRPr lang="en-US"/>
           </a:p>
@@ -948,7 +948,7 @@
           <a:p>
             <a:fld id="{8A78DFF1-9FDC-144B-973E-B4B4609709DF}" type="datetime1">
               <a:rPr lang="ru-RU" smtClean="0"/>
-              <a:t>15.07.2025</a:t>
+              <a:t>21.07.2025</a:t>
             </a:fld>
             <a:endParaRPr lang="en-US"/>
           </a:p>
@@ -1118,7 +1118,7 @@
           <a:p>
             <a:fld id="{8233A339-F8AE-5C45-BEAE-07EF9DC78B60}" type="datetime1">
               <a:rPr lang="ru-RU" smtClean="0"/>
-              <a:t>15.07.2025</a:t>
+              <a:t>21.07.2025</a:t>
             </a:fld>
             <a:endParaRPr lang="en-US"/>
           </a:p>
@@ -1364,7 +1364,7 @@
           <a:p>
             <a:fld id="{7586FDE4-97E0-CE4A-988C-F30B221290A7}" type="datetime1">
               <a:rPr lang="ru-RU" smtClean="0"/>
-              <a:t>15.07.2025</a:t>
+              <a:t>21.07.2025</a:t>
             </a:fld>
             <a:endParaRPr lang="en-US"/>
           </a:p>
@@ -1596,7 +1596,7 @@
           <a:p>
             <a:fld id="{C36ECE8B-8DEC-154E-9F03-047C8DDA20DC}" type="datetime1">
               <a:rPr lang="ru-RU" smtClean="0"/>
-              <a:t>15.07.2025</a:t>
+              <a:t>21.07.2025</a:t>
             </a:fld>
             <a:endParaRPr lang="en-US"/>
           </a:p>
@@ -1963,7 +1963,7 @@
           <a:p>
             <a:fld id="{440816D5-BDB8-B34B-8ACA-ECBDD12E7321}" type="datetime1">
               <a:rPr lang="ru-RU" smtClean="0"/>
-              <a:t>15.07.2025</a:t>
+              <a:t>21.07.2025</a:t>
             </a:fld>
             <a:endParaRPr lang="en-US"/>
           </a:p>
@@ -2081,7 +2081,7 @@
           <a:p>
             <a:fld id="{8A8C589A-5627-764C-AF96-C1E2F9A00A4D}" type="datetime1">
               <a:rPr lang="ru-RU" smtClean="0"/>
-              <a:t>15.07.2025</a:t>
+              <a:t>21.07.2025</a:t>
             </a:fld>
             <a:endParaRPr lang="en-US"/>
           </a:p>
@@ -2176,7 +2176,7 @@
           <a:p>
             <a:fld id="{603EE0D0-1696-6D4F-B917-4AFB24A74E8B}" type="datetime1">
               <a:rPr lang="ru-RU" smtClean="0"/>
-              <a:t>15.07.2025</a:t>
+              <a:t>21.07.2025</a:t>
             </a:fld>
             <a:endParaRPr lang="en-US"/>
           </a:p>
@@ -2453,7 +2453,7 @@
           <a:p>
             <a:fld id="{13C8A91E-B09B-2240-9AA3-B1D4BCC6296E}" type="datetime1">
               <a:rPr lang="ru-RU" smtClean="0"/>
-              <a:t>15.07.2025</a:t>
+              <a:t>21.07.2025</a:t>
             </a:fld>
             <a:endParaRPr lang="en-US"/>
           </a:p>
@@ -2710,7 +2710,7 @@
           <a:p>
             <a:fld id="{3BE9760E-DA8D-6747-B31E-62858C8727B8}" type="datetime1">
               <a:rPr lang="ru-RU" smtClean="0"/>
-              <a:t>15.07.2025</a:t>
+              <a:t>21.07.2025</a:t>
             </a:fld>
             <a:endParaRPr lang="en-US"/>
           </a:p>
@@ -2923,7 +2923,7 @@
           <a:p>
             <a:fld id="{D31305DF-F750-CC43-967D-51A20925EE94}" type="datetime1">
               <a:rPr lang="ru-RU" smtClean="0"/>
-              <a:t>15.07.2025</a:t>
+              <a:t>21.07.2025</a:t>
             </a:fld>
             <a:endParaRPr lang="en-US"/>
           </a:p>
@@ -3375,7 +3375,9 @@
           </a:xfrm>
         </p:spPr>
         <p:txBody>
-          <a:bodyPr/>
+          <a:bodyPr>
+            <a:normAutofit lnSpcReduction="10000"/>
+          </a:bodyPr>
           <a:lstStyle/>
           <a:p>
             <a:r>
@@ -3530,12 +3532,45 @@
               <a:rPr lang="en" dirty="0">
                 <a:hlinkClick r:id="rId9"/>
               </a:rPr>
-              <a:t>https://github.com/thuml/Time-Series-Library</a:t>
+              <a:t>https://</a:t>
+            </a:r>
+            <a:r>
+              <a:rPr lang="en" dirty="0" smtClean="0">
+                <a:hlinkClick r:id="rId9"/>
+              </a:rPr>
+              <a:t>github.com/thuml/Time-Series-Library</a:t>
+            </a:r>
+            <a:r>
+              <a:rPr lang="ru-RU" dirty="0" smtClean="0"/>
+              <a:t> </a:t>
             </a:r>
             <a:r>
               <a:rPr lang="ru-RU" dirty="0"/>
-              <a:t> - Библиотека анализа ВР</a:t>
-            </a:r>
+              <a:t>- Библиотека анализа </a:t>
+            </a:r>
+            <a:r>
+              <a:rPr lang="ru-RU" dirty="0" smtClean="0"/>
+              <a:t>ВР</a:t>
+            </a:r>
+          </a:p>
+          <a:p>
+            <a:r>
+              <a:rPr lang="en-US" dirty="0">
+                <a:hlinkClick r:id="rId10"/>
+              </a:rPr>
+              <a:t>https://</a:t>
+            </a:r>
+            <a:r>
+              <a:rPr lang="en-US" dirty="0" smtClean="0">
+                <a:hlinkClick r:id="rId10"/>
+              </a:rPr>
+              <a:t>ej.hse.ru/data/2010/12/31/1208182168/06_02_07.pdf</a:t>
+            </a:r>
+            <a:r>
+              <a:rPr lang="ru-RU" dirty="0" smtClean="0"/>
+              <a:t> </a:t>
+            </a:r>
+            <a:endParaRPr lang="ru-RU" dirty="0"/>
           </a:p>
         </p:txBody>
       </p:sp>
@@ -3572,11 +3607,11 @@
   <p:clrMapOvr>
     <a:masterClrMapping/>
   </p:clrMapOvr>
-  <mc:AlternateContent xmlns:mc="http://schemas.openxmlformats.org/markup-compatibility/2006">
-    <mc:Choice xmlns:p14="http://schemas.microsoft.com/office/powerpoint/2010/main" Requires="p14">
+  <mc:AlternateContent xmlns:mc="http://schemas.openxmlformats.org/markup-compatibility/2006" xmlns:p14="http://schemas.microsoft.com/office/powerpoint/2010/main">
+    <mc:Choice Requires="p14">
       <p:transition spd="slow" p14:dur="2000"/>
     </mc:Choice>
-    <mc:Fallback>
+    <mc:Fallback xmlns="">
       <p:transition spd="slow"/>
     </mc:Fallback>
   </mc:AlternateContent>
@@ -3817,11 +3852,11 @@
   <p:clrMapOvr>
     <a:masterClrMapping/>
   </p:clrMapOvr>
-  <mc:AlternateContent xmlns:mc="http://schemas.openxmlformats.org/markup-compatibility/2006">
-    <mc:Choice xmlns:p14="http://schemas.microsoft.com/office/powerpoint/2010/main" Requires="p14">
+  <mc:AlternateContent xmlns:mc="http://schemas.openxmlformats.org/markup-compatibility/2006" xmlns:p14="http://schemas.microsoft.com/office/powerpoint/2010/main">
+    <mc:Choice Requires="p14">
       <p:transition spd="slow" p14:dur="2000"/>
     </mc:Choice>
-    <mc:Fallback>
+    <mc:Fallback xmlns="">
       <p:transition spd="slow"/>
     </mc:Fallback>
   </mc:AlternateContent>
@@ -4008,11 +4043,11 @@
               <a:t>http://repo.darmajaya.ac.id/4781/1/Time%20Series%20Analysis_%20Forecasting%20and%20Control%20%28%20PDFDrive%20%29.pdf</a:t>
             </a:r>
             <a:r>
-              <a:rPr lang="ru-RU"/>
+              <a:rPr lang="ru-RU" dirty="0"/>
               <a:t> </a:t>
             </a:r>
             <a:r>
-              <a:rPr lang="en-US"/>
+              <a:rPr lang="en-US" dirty="0"/>
               <a:t> </a:t>
             </a:r>
             <a:endParaRPr lang="ru-RU" dirty="0"/>
@@ -4058,11 +4093,11 @@
   <p:clrMapOvr>
     <a:masterClrMapping/>
   </p:clrMapOvr>
-  <mc:AlternateContent xmlns:mc="http://schemas.openxmlformats.org/markup-compatibility/2006">
-    <mc:Choice xmlns:p14="http://schemas.microsoft.com/office/powerpoint/2010/main" Requires="p14">
+  <mc:AlternateContent xmlns:mc="http://schemas.openxmlformats.org/markup-compatibility/2006" xmlns:p14="http://schemas.microsoft.com/office/powerpoint/2010/main">
+    <mc:Choice Requires="p14">
       <p:transition spd="slow" p14:dur="2000"/>
     </mc:Choice>
-    <mc:Fallback>
+    <mc:Fallback xmlns="">
       <p:transition spd="slow"/>
     </mc:Fallback>
   </mc:AlternateContent>
@@ -4379,11 +4414,11 @@
   <p:clrMapOvr>
     <a:masterClrMapping/>
   </p:clrMapOvr>
-  <mc:AlternateContent xmlns:mc="http://schemas.openxmlformats.org/markup-compatibility/2006">
-    <mc:Choice xmlns:p14="http://schemas.microsoft.com/office/powerpoint/2010/main" Requires="p14">
+  <mc:AlternateContent xmlns:mc="http://schemas.openxmlformats.org/markup-compatibility/2006" xmlns:p14="http://schemas.microsoft.com/office/powerpoint/2010/main">
+    <mc:Choice Requires="p14">
       <p:transition spd="slow" p14:dur="2000"/>
     </mc:Choice>
-    <mc:Fallback>
+    <mc:Fallback xmlns="">
       <p:transition spd="slow"/>
     </mc:Fallback>
   </mc:AlternateContent>
